--- a/docs/content/descriptive_stats/descriptive_stats_lecture.pptx
+++ b/docs/content/descriptive_stats/descriptive_stats_lecture.pptx
@@ -3326,7 +3326,7 @@
             </a:pPr>
             <a:r>
               <a:rPr/>
-              <a:t>Describing Your Data</a:t>
+              <a:t>Lecture: Describing Your Data</a:t>
             </a:r>
           </a:p>
         </p:txBody>
@@ -4386,7 +4386,7 @@
             </a:pPr>
             <a:r>
               <a:rPr/>
-              <a:t>Quantiles — Why This Matters for Module 4</a:t>
+              <a:t>Quantiles — Why This Matters for Graphing Effectively</a:t>
             </a:r>
           </a:p>
         </p:txBody>
@@ -4522,7 +4522,7 @@
             </a:r>
             <a:r>
               <a:rPr sz="2000"/>
-              <a:t> the IQR — its bottom and top edges are the 25th and 75th percentiles you just computed. Module 4’s boxplots are these five numbers, drawn.</a:t>
+              <a:t> the IQR — its bottom and top edges are the 25th and 75th percentiles you just computed. The boxplots you’ll build in Graphing Effectively are these five numbers, drawn.</a:t>
             </a:r>
           </a:p>
         </p:txBody>
@@ -6326,7 +6326,7 @@
             </a:pPr>
             <a:r>
               <a:rPr sz="2000" b="1"/>
-              <a:t>✅ Key idea from Module 2</a:t>
+              <a:t>✅ Key idea from Wrangling Your Data</a:t>
             </a:r>
           </a:p>
           <a:p>
@@ -12883,7 +12883,7 @@
             </a:r>
             <a:r>
               <a:rPr/>
-              <a:t> from Module 2</a:t>
+              <a:t> from Wrangling Your Data</a:t>
             </a:r>
           </a:p>
         </p:txBody>
@@ -13013,7 +13013,7 @@
             </a:r>
             <a:r>
               <a:rPr sz="2000"/>
-              <a:t>) from Module 2’s </a:t>
+              <a:t>) from Wrangling Your Data’s </a:t>
             </a:r>
             <a:r>
               <a:rPr sz="2000">
@@ -14181,7 +14181,7 @@
             </a:r>
             <a:r>
               <a:rPr/>
-              <a:t> categories from Module 2</a:t>
+              <a:t> categories from Wrangling Your Data</a:t>
             </a:r>
           </a:p>
           <a:p>
@@ -14282,7 +14282,7 @@
             </a:pPr>
             <a:r>
               <a:rPr sz="2000" b="1"/>
-              <a:t>Up next — Module 4</a:t>
+              <a:t>Up next — Graphing Effectively</a:t>
             </a:r>
           </a:p>
           <a:p>

--- a/docs/content/descriptive_stats/descriptive_stats_lecture.pptx
+++ b/docs/content/descriptive_stats/descriptive_stats_lecture.pptx
@@ -3738,7 +3738,7 @@
                 </a:solidFill>
                 <a:latin typeface="Courier"/>
               </a:rPr>
-              <a:t>(lee_lengths)</a:t>
+              <a:t>(shady_lengths)</a:t>
             </a:r>
           </a:p>
           <a:p>
@@ -3772,7 +3772,7 @@
                 </a:solidFill>
                 <a:latin typeface="Courier"/>
               </a:rPr>
-              <a:t>(lee_lengths)</a:t>
+              <a:t>(shady_lengths)</a:t>
             </a:r>
           </a:p>
           <a:p>
@@ -3806,7 +3806,7 @@
                 </a:solidFill>
                 <a:latin typeface="Courier"/>
               </a:rPr>
-              <a:t>(wind_lengths)</a:t>
+              <a:t>(sunny_lengths)</a:t>
             </a:r>
           </a:p>
           <a:p>
@@ -3840,7 +3840,7 @@
                 </a:solidFill>
                 <a:latin typeface="Courier"/>
               </a:rPr>
-              <a:t>(wind_lengths)</a:t>
+              <a:t>(sunny_lengths)</a:t>
             </a:r>
           </a:p>
           <a:p>
@@ -4024,7 +4024,7 @@
                 </a:solidFill>
                 <a:latin typeface="Courier"/>
               </a:rPr>
-              <a:t>(lee_lengths)              </a:t>
+              <a:t>(shady_lengths)              </a:t>
             </a:r>
             <a:r>
               <a:rPr>
@@ -4067,7 +4067,7 @@
                 </a:solidFill>
                 <a:latin typeface="Courier"/>
               </a:rPr>
-              <a:t>(lee_lengths) </a:t>
+              <a:t>(shady_lengths) </a:t>
             </a:r>
             <a:r>
               <a:rPr>
@@ -4103,7 +4103,7 @@
                 </a:solidFill>
                 <a:latin typeface="Courier"/>
               </a:rPr>
-              <a:t>(lee_lengths)  </a:t>
+              <a:t>(shady_lengths)  </a:t>
             </a:r>
             <a:r>
               <a:rPr>
@@ -4146,7 +4146,7 @@
                 </a:solidFill>
                 <a:latin typeface="Courier"/>
               </a:rPr>
-              <a:t>(lee_lengths)           </a:t>
+              <a:t>(shady_lengths)           </a:t>
             </a:r>
             <a:r>
               <a:rPr>
@@ -4190,7 +4190,7 @@
                 </a:solidFill>
                 <a:latin typeface="Courier"/>
               </a:rPr>
-              <a:t>(lee_lengths)                </a:t>
+              <a:t>(shady_lengths)                </a:t>
             </a:r>
             <a:r>
               <a:rPr>
@@ -4425,7 +4425,7 @@
                 </a:solidFill>
                 <a:latin typeface="Courier"/>
               </a:rPr>
-              <a:t>(wind_lengths)</a:t>
+              <a:t>(sunny_lengths)</a:t>
             </a:r>
           </a:p>
           <a:p>
@@ -4460,7 +4460,7 @@
                 </a:solidFill>
                 <a:latin typeface="Courier"/>
               </a:rPr>
-              <a:t>(wind_lengths)</a:t>
+              <a:t>(sunny_lengths)</a:t>
             </a:r>
           </a:p>
           <a:p>
@@ -5941,7 +5941,7 @@
                 </a:solidFill>
                 <a:latin typeface="Courier"/>
               </a:rPr>
-              <a:t>n_lee  &lt;- </a:t>
+              <a:t>n_shady  &lt;- </a:t>
             </a:r>
             <a:r>
               <a:rPr>
@@ -5986,7 +5986,7 @@
                 </a:solidFill>
                 <a:latin typeface="Courier"/>
               </a:rPr>
-              <a:t>(lee_lengths))</a:t>
+              <a:t>(shady_lengths))</a:t>
             </a:r>
             <a:br/>
             <a:r>
@@ -5996,7 +5996,7 @@
                 </a:solidFill>
                 <a:latin typeface="Courier"/>
               </a:rPr>
-              <a:t>n_wind &lt;- </a:t>
+              <a:t>n_sunny &lt;- </a:t>
             </a:r>
             <a:r>
               <a:rPr>
@@ -6041,7 +6041,7 @@
                 </a:solidFill>
                 <a:latin typeface="Courier"/>
               </a:rPr>
-              <a:t>(wind_lengths))</a:t>
+              <a:t>(sunny_lengths))</a:t>
             </a:r>
             <a:br/>
             <a:br/>
@@ -6052,7 +6052,7 @@
                 </a:solidFill>
                 <a:latin typeface="Courier"/>
               </a:rPr>
-              <a:t>n_lee</a:t>
+              <a:t>n_shady</a:t>
             </a:r>
           </a:p>
           <a:p>
@@ -6077,7 +6077,7 @@
                 </a:solidFill>
                 <a:latin typeface="Courier"/>
               </a:rPr>
-              <a:t>n_wind</a:t>
+              <a:t>n_sunny</a:t>
             </a:r>
           </a:p>
           <a:p>
@@ -6866,7 +6866,7 @@
                 </a:solidFill>
                 <a:latin typeface="Courier"/>
               </a:rPr>
-              <a:t>se_lee  &lt;- </a:t>
+              <a:t>se_shady  &lt;- </a:t>
             </a:r>
             <a:r>
               <a:rPr>
@@ -6884,7 +6884,7 @@
                 </a:solidFill>
                 <a:latin typeface="Courier"/>
               </a:rPr>
-              <a:t>(lee_lengths)  </a:t>
+              <a:t>(shady_lengths)  </a:t>
             </a:r>
             <a:r>
               <a:rPr>
@@ -6920,7 +6920,7 @@
                 </a:solidFill>
                 <a:latin typeface="Courier"/>
               </a:rPr>
-              <a:t>(n_lee)</a:t>
+              <a:t>(n_shady)</a:t>
             </a:r>
             <a:br/>
             <a:r>
@@ -6930,7 +6930,7 @@
                 </a:solidFill>
                 <a:latin typeface="Courier"/>
               </a:rPr>
-              <a:t>se_wind &lt;- </a:t>
+              <a:t>se_sunny &lt;- </a:t>
             </a:r>
             <a:r>
               <a:rPr>
@@ -6948,7 +6948,7 @@
                 </a:solidFill>
                 <a:latin typeface="Courier"/>
               </a:rPr>
-              <a:t>(wind_lengths) </a:t>
+              <a:t>(sunny_lengths) </a:t>
             </a:r>
             <a:r>
               <a:rPr>
@@ -6984,7 +6984,7 @@
                 </a:solidFill>
                 <a:latin typeface="Courier"/>
               </a:rPr>
-              <a:t>(n_wind)</a:t>
+              <a:t>(n_sunny)</a:t>
             </a:r>
             <a:br/>
             <a:br/>
@@ -7004,7 +7004,7 @@
                 </a:solidFill>
                 <a:latin typeface="Courier"/>
               </a:rPr>
-              <a:t>(se_lee, </a:t>
+              <a:t>(se_shady, </a:t>
             </a:r>
             <a:r>
               <a:rPr>
@@ -7056,7 +7056,7 @@
                 </a:solidFill>
                 <a:latin typeface="Courier"/>
               </a:rPr>
-              <a:t>(se_wind, </a:t>
+              <a:t>(se_sunny, </a:t>
             </a:r>
             <a:r>
               <a:rPr>
@@ -7266,7 +7266,7 @@
                 </a:solidFill>
                 <a:latin typeface="Courier"/>
               </a:rPr>
-              <a:t>(lee_lengths))</a:t>
+              <a:t>(shady_lengths))</a:t>
             </a:r>
             <a:br/>
             <a:r>
@@ -7294,7 +7294,7 @@
                 </a:solidFill>
                 <a:latin typeface="Courier"/>
               </a:rPr>
-              <a:t>(lee_lengths, </a:t>
+              <a:t>(shady_lengths, </a:t>
             </a:r>
             <a:r>
               <a:rPr>
@@ -7358,7 +7358,7 @@
                 </a:solidFill>
                 <a:latin typeface="Courier"/>
               </a:rPr>
-              <a:t>(lee_lengths, </a:t>
+              <a:t>(shady_lengths, </a:t>
             </a:r>
             <a:r>
               <a:rPr>
@@ -7422,7 +7422,7 @@
                 </a:solidFill>
                 <a:latin typeface="Courier"/>
               </a:rPr>
-              <a:t>(lee_lengths, </a:t>
+              <a:t>(shady_lengths, </a:t>
             </a:r>
             <a:r>
               <a:rPr>
@@ -7533,7 +7533,7 @@
                 </a:solidFill>
                 <a:latin typeface="Courier"/>
               </a:rPr>
-              <a:t>"--- Lee side ---</a:t>
+              <a:t>"--- Shady side ---</a:t>
             </a:r>
             <a:r>
               <a:rPr>
@@ -8035,7 +8035,7 @@
               <a:rPr>
                 <a:latin typeface="Courier"/>
               </a:rPr>
-              <a:t>--- Lee side ---
+              <a:t>--- Shady side ---
  n      = 24 
  Mean   = 20.42 
  Median = 20.5 
@@ -9255,7 +9255,7 @@
                       </a:pPr>
                       <a:r>
                         <a:rPr/>
-                        <a:t>wind</a:t>
+                        <a:t>sun</a:t>
                       </a:r>
                     </a:p>
                   </a:txBody>
@@ -9300,7 +9300,7 @@
                       </a:pPr>
                       <a:r>
                         <a:rPr/>
-                        <a:t>3</a:t>
+                        <a:t>5</a:t>
                       </a:r>
                     </a:p>
                   </a:txBody>
@@ -9315,7 +9315,7 @@
                       </a:pPr>
                       <a:r>
                         <a:rPr/>
-                        <a:t>4</a:t>
+                        <a:t>5</a:t>
                       </a:r>
                     </a:p>
                   </a:txBody>
@@ -12769,7 +12769,7 @@
             </a:pPr>
             <a:r>
               <a:rPr sz="2000"/>
-              <a:t>Four teams × two sides = 8 rows. Does every team show the same lee-vs-windward pattern, or do some disagree?</a:t>
+              <a:t>Four teams × two sides = 8 rows. Does every team show the same shady-vs-sunny pattern, or do some disagree?</a:t>
             </a:r>
           </a:p>
         </p:txBody>
@@ -14583,7 +14583,7 @@
             </a:r>
             <a:r>
               <a:rPr/>
-              <a:t> No difference in needle length between the lee and windward sides</a:t>
+              <a:t> No difference in needle length between the shady and sunny sides</a:t>
             </a:r>
           </a:p>
           <a:p>
@@ -14782,7 +14782,7 @@
             </a:r>
             <a:r>
               <a:rPr sz="2000"/>
-              <a:t> codes lee (</a:t>
+              <a:t> codes shady (</a:t>
             </a:r>
             <a:r>
               <a:rPr sz="2000">
@@ -14792,7 +14792,7 @@
             </a:r>
             <a:r>
               <a:rPr sz="2000"/>
-              <a:t>) vs. windward (</a:t>
+              <a:t>) vs. sunny (</a:t>
             </a:r>
             <a:r>
               <a:rPr sz="2000">
@@ -15147,7 +15147,7 @@
                 </a:solidFill>
                 <a:latin typeface="Courier"/>
               </a:rPr>
-              <a:t>lee_lengths &lt;- pine_df </a:t>
+              <a:t>shady_lengths &lt;- pine_df </a:t>
             </a:r>
             <a:r>
               <a:rPr>
@@ -15268,7 +15268,7 @@
                 </a:solidFill>
                 <a:latin typeface="Courier"/>
               </a:rPr>
-              <a:t>lee_lengths</a:t>
+              <a:t>shady_lengths</a:t>
             </a:r>
           </a:p>
           <a:p>
@@ -15302,7 +15302,7 @@
                 </a:solidFill>
                 <a:latin typeface="Courier"/>
               </a:rPr>
-              <a:t>(lee_lengths)</a:t>
+              <a:t>(shady_lengths)</a:t>
             </a:r>
           </a:p>
           <a:p>
@@ -15714,7 +15714,7 @@
                 </a:solidFill>
                 <a:latin typeface="Courier"/>
               </a:rPr>
-              <a:t>wind_lengths &lt;- pine_df </a:t>
+              <a:t>sunny_lengths &lt;- pine_df </a:t>
             </a:r>
             <a:r>
               <a:rPr>
@@ -15844,7 +15844,7 @@
                 </a:solidFill>
                 <a:latin typeface="Courier"/>
               </a:rPr>
-              <a:t>(lee_lengths)</a:t>
+              <a:t>(shady_lengths)</a:t>
             </a:r>
           </a:p>
           <a:p>
@@ -15878,7 +15878,7 @@
                 </a:solidFill>
                 <a:latin typeface="Courier"/>
               </a:rPr>
-              <a:t>(wind_lengths)</a:t>
+              <a:t>(sunny_lengths)</a:t>
             </a:r>
           </a:p>
           <a:p>

--- a/docs/content/descriptive_stats/descriptive_stats_lecture.pptx
+++ b/docs/content/descriptive_stats/descriptive_stats_lecture.pptx
@@ -3662,7 +3662,7 @@
                 </a:r>
                 <a:r>
                   <a:rPr/>
-                  <a:t> brings variance back into the original units</a:t>
+                  <a:t> brings variance back into the original units as the standard deviation</a:t>
                 </a:r>
               </a:p>
               <a:p>
@@ -3684,9 +3684,7 @@
                 </a:r>
               </a:p>
               <a:p>
-                <a:pPr lvl="0" indent="0" marL="1270000">
-                  <a:buNone/>
-                </a:pPr>
+                <a:pPr lvl="0"/>
                 <a:r>
                   <a:rPr sz="2000"/>
                   <a:t>Variance is in </a:t>
@@ -3697,7 +3695,21 @@
                 </a:r>
                 <a:r>
                   <a:rPr sz="2000"/>
-                  <a:t> units (mm²) — hard to interpret directly. SD is why we usually report it instead.</a:t>
+                  <a:t> units (mm²)</a:t>
+                </a:r>
+              </a:p>
+              <a:p>
+                <a:pPr lvl="0"/>
+                <a:r>
+                  <a:rPr sz="2000"/>
+                  <a:t>hard to interpret directly.</a:t>
+                </a:r>
+              </a:p>
+              <a:p>
+                <a:pPr lvl="0"/>
+                <a:r>
+                  <a:rPr sz="2000"/>
+                  <a:t>Standard deviation (SD) is why we usually report it instead</a:t>
                 </a:r>
               </a:p>
             </p:txBody>
@@ -3873,12 +3885,24 @@
             </a:r>
           </a:p>
           <a:p>
-            <a:pPr lvl="0" indent="0" marL="1270000">
-              <a:buNone/>
-            </a:pPr>
+            <a:pPr lvl="0"/>
             <a:r>
               <a:rPr sz="2000"/>
-              <a:t>For roughly normal data: ~68% of values fall within mean ± 1 SD, ~95% within mean ± 2 SD.</a:t>
+              <a:t>For roughly normal data:</a:t>
+            </a:r>
+          </a:p>
+          <a:p>
+            <a:pPr lvl="1"/>
+            <a:r>
+              <a:rPr sz="2000"/>
+              <a:t>~68% of values fall within mean ± 1 SD</a:t>
+            </a:r>
+          </a:p>
+          <a:p>
+            <a:pPr lvl="1"/>
+            <a:r>
+              <a:rPr sz="2000"/>
+              <a:t>~95% within mean ± 2 SD</a:t>
             </a:r>
           </a:p>
         </p:txBody>
@@ -4214,6 +4238,156 @@
             </a:r>
           </a:p>
           <a:p>
+            <a:pPr lvl="0" indent="0">
+              <a:buNone/>
+            </a:pPr>
+            <a:r>
+              <a:rPr>
+                <a:solidFill>
+                  <a:srgbClr val="003B4F"/>
+                </a:solidFill>
+                <a:latin typeface="Courier"/>
+              </a:rPr>
+              <a:t>box_plot_1 &lt;- </a:t>
+            </a:r>
+            <a:r>
+              <a:rPr>
+                <a:solidFill>
+                  <a:srgbClr val="4758AB"/>
+                </a:solidFill>
+                <a:latin typeface="Courier"/>
+              </a:rPr>
+              <a:t>ggplot</a:t>
+            </a:r>
+            <a:r>
+              <a:rPr>
+                <a:solidFill>
+                  <a:srgbClr val="003B4F"/>
+                </a:solidFill>
+                <a:latin typeface="Courier"/>
+              </a:rPr>
+              <a:t>(</a:t>
+            </a:r>
+            <a:r>
+              <a:rPr>
+                <a:solidFill>
+                  <a:srgbClr val="657422"/>
+                </a:solidFill>
+                <a:latin typeface="Courier"/>
+              </a:rPr>
+              <a:t>data =</a:t>
+            </a:r>
+            <a:r>
+              <a:rPr>
+                <a:solidFill>
+                  <a:srgbClr val="003B4F"/>
+                </a:solidFill>
+                <a:latin typeface="Courier"/>
+              </a:rPr>
+              <a:t> </a:t>
+            </a:r>
+            <a:r>
+              <a:rPr>
+                <a:solidFill>
+                  <a:srgbClr val="8F5902"/>
+                </a:solidFill>
+                <a:latin typeface="Courier"/>
+              </a:rPr>
+              <a:t>NULL</a:t>
+            </a:r>
+            <a:r>
+              <a:rPr>
+                <a:solidFill>
+                  <a:srgbClr val="003B4F"/>
+                </a:solidFill>
+                <a:latin typeface="Courier"/>
+              </a:rPr>
+              <a:t>, </a:t>
+            </a:r>
+            <a:r>
+              <a:rPr>
+                <a:solidFill>
+                  <a:srgbClr val="4758AB"/>
+                </a:solidFill>
+                <a:latin typeface="Courier"/>
+              </a:rPr>
+              <a:t>aes</a:t>
+            </a:r>
+            <a:r>
+              <a:rPr>
+                <a:solidFill>
+                  <a:srgbClr val="003B4F"/>
+                </a:solidFill>
+                <a:latin typeface="Courier"/>
+              </a:rPr>
+              <a:t>(</a:t>
+            </a:r>
+            <a:r>
+              <a:rPr>
+                <a:solidFill>
+                  <a:srgbClr val="657422"/>
+                </a:solidFill>
+                <a:latin typeface="Courier"/>
+              </a:rPr>
+              <a:t>y =</a:t>
+            </a:r>
+            <a:r>
+              <a:rPr>
+                <a:solidFill>
+                  <a:srgbClr val="003B4F"/>
+                </a:solidFill>
+                <a:latin typeface="Courier"/>
+              </a:rPr>
+              <a:t> shady_lengths)) </a:t>
+            </a:r>
+            <a:r>
+              <a:rPr>
+                <a:solidFill>
+                  <a:srgbClr val="5E5E5E"/>
+                </a:solidFill>
+                <a:latin typeface="Courier"/>
+              </a:rPr>
+              <a:t>+</a:t>
+            </a:r>
+            <a:r>
+              <a:rPr>
+                <a:solidFill>
+                  <a:srgbClr val="003B4F"/>
+                </a:solidFill>
+                <a:latin typeface="Courier"/>
+              </a:rPr>
+              <a:t> </a:t>
+            </a:r>
+            <a:br/>
+            <a:r>
+              <a:rPr>
+                <a:solidFill>
+                  <a:srgbClr val="003B4F"/>
+                </a:solidFill>
+                <a:latin typeface="Courier"/>
+              </a:rPr>
+              <a:t>  </a:t>
+            </a:r>
+            <a:r>
+              <a:rPr>
+                <a:solidFill>
+                  <a:srgbClr val="4758AB"/>
+                </a:solidFill>
+                <a:latin typeface="Courier"/>
+              </a:rPr>
+              <a:t>geom_boxplot</a:t>
+            </a:r>
+            <a:r>
+              <a:rPr>
+                <a:solidFill>
+                  <a:srgbClr val="003B4F"/>
+                </a:solidFill>
+                <a:latin typeface="Courier"/>
+              </a:rPr>
+              <a:t>()</a:t>
+            </a:r>
+          </a:p>
+          <a:p>
             <a:pPr lvl="0" indent="0" marL="1270000">
               <a:buNone/>
             </a:pPr>
@@ -4333,6 +4507,25 @@
               <a:rPr sz="2000"/>
               <a:t>📖 R4DS §12 — EDA</a:t>
             </a:r>
+          </a:p>
+          <a:p>
+            <a:pPr lvl="0" indent="0">
+              <a:buNone/>
+            </a:pPr>
+            <a:r>
+              <a:rPr>
+                <a:solidFill>
+                  <a:srgbClr val="003B4F"/>
+                </a:solidFill>
+                <a:latin typeface="Courier"/>
+              </a:rPr>
+              <a:t>box_plot_1</a:t>
+            </a:r>
+          </a:p>
+          <a:p>
+            <a:pPr lvl="0" indent="0" marL="1270000">
+              <a:buNone/>
+            </a:pPr>
           </a:p>
         </p:txBody>
       </p:sp>
@@ -5365,7 +5558,7 @@
                 </a:solidFill>
                 <a:latin typeface="Courier"/>
               </a:rPr>
-              <a:t>)</a:t>
+              <a:t>) </a:t>
             </a:r>
           </a:p>
           <a:p>
@@ -5377,6 +5570,20 @@
                 <a:latin typeface="Courier"/>
               </a:rPr>
               <a:t>[1] 0.931</a:t>
+            </a:r>
+          </a:p>
+          <a:p>
+            <a:pPr lvl="0" indent="0">
+              <a:buNone/>
+            </a:pPr>
+            <a:r>
+              <a:rPr>
+                <a:solidFill>
+                  <a:srgbClr val="5E5E5E"/>
+                </a:solidFill>
+                <a:latin typeface="Courier"/>
+              </a:rPr>
+              <a:t># note base r rounding is really odd - use round_half_up from janitor</a:t>
             </a:r>
           </a:p>
         </p:txBody>
@@ -11078,9 +11285,7 @@
             </a:r>
           </a:p>
           <a:p>
-            <a:pPr lvl="0" indent="0" marL="1270000">
-              <a:buNone/>
-            </a:pPr>
+            <a:pPr lvl="0"/>
             <a:r>
               <a:rPr sz="2000">
                 <a:latin typeface="Courier"/>
@@ -11089,7 +11294,14 @@
             </a:r>
             <a:r>
               <a:rPr sz="2000"/>
-              <a:t> is a first look, not a final answer. It doesn’t know that </a:t>
+              <a:t> is a first look, not a final answer.</a:t>
+            </a:r>
+          </a:p>
+          <a:p>
+            <a:pPr lvl="0"/>
+            <a:r>
+              <a:rPr sz="2000"/>
+              <a:t>you can pipe groups into it to show that </a:t>
             </a:r>
             <a:r>
               <a:rPr sz="2000">
@@ -11107,9 +11319,12 @@
               </a:rPr>
               <a:t>n_s</a:t>
             </a:r>
+          </a:p>
+          <a:p>
+            <a:pPr lvl="1"/>
             <a:r>
               <a:rPr sz="2000"/>
-              <a:t> — for real per-group comparisons, you still need </a:t>
+              <a:t>for real per-group comparisons, you still need </a:t>
             </a:r>
             <a:r>
               <a:rPr sz="2000">
@@ -14812,7 +15027,12 @@
             </a:r>
             <a:r>
               <a:rPr sz="2000"/>
-              <a:t> is the field team name. Four teams, four trees, six needles per side.</a:t>
+              <a:t> is the field team name.</a:t>
+            </a:r>
+            <a:br/>
+            <a:r>
+              <a:rPr sz="2000"/>
+              <a:t>Four teams, four trees, six needles per side.</a:t>
             </a:r>
           </a:p>
         </p:txBody>
@@ -15057,7 +15277,7 @@
                 </a:r>
                 <a:r>
                   <a:rPr/>
-                  <a:t> — one very large value pulls it</a:t>
+                  <a:t> — one very large value disproportionately affects the mean</a:t>
                 </a:r>
               </a:p>
               <a:p>
@@ -15078,7 +15298,17 @@
                 </a:r>
                 <a:r>
                   <a:rPr/>
-                  <a:t> → mean = 15.2. Is that a fair summary? Not really — the outlier dominates.</a:t>
+                  <a:t> → mean = 15.2.</a:t>
+                </a:r>
+                <a:br/>
+                <a:r>
+                  <a:rPr/>
+                  <a:t>Is that a fair summary?</a:t>
+                </a:r>
+                <a:br/>
+                <a:r>
+                  <a:rPr/>
+                  <a:t>Not really — the outlier dominates.</a:t>
                 </a:r>
               </a:p>
               <a:p>
@@ -15105,7 +15335,12 @@
                 </a:pPr>
                 <a:r>
                   <a:rPr sz="2000"/>
-                  <a:t>The mean is the most commonly reported statistic — and it’s the number every t-test, ANOVA, and regression is ultimately built around.</a:t>
+                  <a:t>The mean is the most commonly reported statistic</a:t>
+                </a:r>
+                <a:br/>
+                <a:r>
+                  <a:rPr sz="2000"/>
+                  <a:t>— and it’s the number every t-test, ANOVA, and regression is ultimately built around.</a:t>
                 </a:r>
               </a:p>
             </p:txBody>
@@ -15976,7 +16211,15 @@
             </a:pPr>
             <a:r>
               <a:rPr/>
-              <a:t>Part 4 · Variance and Standard Deviation</a:t>
+              <a:t>Part 4 · Variance (s</a:t>
+            </a:r>
+            <a:r>
+              <a:rPr baseline="30000"/>
+              <a:t>2</a:t>
+            </a:r>
+            <a:r>
+              <a:rPr/>
+              <a:t>) and Standard Deviation (sd)</a:t>
             </a:r>
           </a:p>
         </p:txBody>
